--- a/modulo-05/05.01 - Visão Geral do SAP Fiori Elements para OData V4/05.01_SAP_Fiori_elements_para_OData_V4.pptx
+++ b/modulo-05/05.01 - Visão Geral do SAP Fiori Elements para OData V4/05.01_SAP_Fiori_elements_para_OData_V4.pptx
@@ -1639,7 +1639,7 @@
                   <a:srgbClr val="8FA3C7"/>
                 </a:solidFill>
               </a:rPr>
-              <a:t>ABAP Moderno · Módulo 03 — SAP Fiori Elements com OData V4  ·  Aula 1 de 11 — Fiori Elements e OData V4</a:t>
+              <a:t>ABAP Moderno · Módulo 05 — SAP Fiori Elements com OData V4  ·  Aula 1 de 11 — Fiori Elements e OData V4</a:t>
             </a:r>
             <a:endParaRPr lang="en-US" sz="900" dirty="0"/>
           </a:p>
@@ -1785,7 +1785,7 @@
                   <a:srgbClr val="556B82"/>
                 </a:solidFill>
               </a:rPr>
-              <a:t>ABAP Moderno · Módulo 03 — SAP Fiori Elements com OData V4  ·  Aula 1 de 11 — Fiori Elements e OData V4</a:t>
+              <a:t>ABAP Moderno · Módulo 05 — SAP Fiori Elements com OData V4  ·  Aula 1 de 11 — Fiori Elements e OData V4</a:t>
             </a:r>
             <a:endParaRPr lang="en-US" sz="900" dirty="0"/>
           </a:p>
@@ -2216,7 +2216,7 @@
                   <a:srgbClr val="89D1FF"/>
                 </a:solidFill>
               </a:rPr>
-              <a:t>MÓDULO 03 · AULA 01 DE 11</a:t>
+              <a:t>MÓDULO 05 · AULA 01 DE 11</a:t>
             </a:r>
             <a:endParaRPr lang="en-US" sz="1400" dirty="0"/>
           </a:p>
@@ -2646,7 +2646,7 @@
                   <a:srgbClr val="8FA3C7"/>
                 </a:solidFill>
               </a:rPr>
-              <a:t>ABAP Moderno · Módulo 03 — SAP Fiori Elements com OData V4 · Design System SAP Horizon</a:t>
+              <a:t>ABAP Moderno · Módulo 05 — SAP Fiori Elements com OData V4 · Design System SAP Horizon</a:t>
             </a:r>
             <a:endParaRPr lang="en-US" sz="1100" dirty="0"/>
           </a:p>
@@ -2965,7 +2965,7 @@
                   <a:srgbClr val="556B82"/>
                 </a:solidFill>
               </a:rPr>
-              <a:t>ZC_FE_TRAVEL: o que a app usa</a:t>
+              <a:t>ZC_PC_PEDIDO_APP: o que o app usa</a:t>
             </a:r>
             <a:endParaRPr lang="en-US" sz="1400" dirty="0"/>
           </a:p>
@@ -3528,7 +3528,7 @@
         </p:blipFill>
         <p:spPr>
           <a:xfrm>
-            <a:off x="1598257" y="2084832"/>
+            <a:off x="7351205" y="2084832"/>
             <a:ext cx="365760" cy="365760"/>
           </a:xfrm>
           <a:prstGeom prst="rect">
@@ -3552,7 +3552,7 @@
         </p:blipFill>
         <p:spPr>
           <a:xfrm>
-            <a:off x="4474731" y="2084832"/>
+            <a:off x="1598257" y="2084832"/>
             <a:ext cx="365760" cy="365760"/>
           </a:xfrm>
           <a:prstGeom prst="rect">
@@ -3576,7 +3576,7 @@
         </p:blipFill>
         <p:spPr>
           <a:xfrm>
-            <a:off x="7351205" y="2084832"/>
+            <a:off x="4474731" y="2084832"/>
             <a:ext cx="365760" cy="365760"/>
           </a:xfrm>
           <a:prstGeom prst="rect">
@@ -3648,7 +3648,7 @@
         </p:blipFill>
         <p:spPr>
           <a:xfrm>
-            <a:off x="8368711" y="3928994"/>
+            <a:off x="4594372" y="3928994"/>
             <a:ext cx="225308" cy="225308"/>
           </a:xfrm>
           <a:prstGeom prst="rect">
@@ -3672,7 +3672,7 @@
         </p:blipFill>
         <p:spPr>
           <a:xfrm>
-            <a:off x="4594372" y="3928994"/>
+            <a:off x="8368711" y="3928994"/>
             <a:ext cx="225308" cy="225308"/>
           </a:xfrm>
           <a:prstGeom prst="rect">
@@ -4278,7 +4278,7 @@
                   <a:srgbClr val="1D2D3E"/>
                 </a:solidFill>
               </a:rPr>
-              <a:t>anotações (03.03), floorplans (03.05) e configuração das páginas (03.06 a 03.09).</a:t>
+              <a:t>anotações (05.03), floorplans (05.05) e configuração das páginas (05.06 a 05.09).</a:t>
             </a:r>
             <a:endParaRPr lang="en-US" sz="1400" dirty="0"/>
           </a:p>
@@ -4300,8 +4300,8 @@
         </p:blipFill>
         <p:spPr>
           <a:xfrm>
-            <a:off x="877824" y="2792063"/>
-            <a:ext cx="256032" cy="256032"/>
+            <a:off x="749808" y="4962049"/>
+            <a:ext cx="310896" cy="310896"/>
           </a:xfrm>
           <a:prstGeom prst="rect">
             <a:avLst/>
@@ -4324,7 +4324,7 @@
         </p:blipFill>
         <p:spPr>
           <a:xfrm>
-            <a:off x="6562192" y="2792063"/>
+            <a:off x="877824" y="2792063"/>
             <a:ext cx="256032" cy="256032"/>
           </a:xfrm>
           <a:prstGeom prst="rect">
@@ -4348,8 +4348,8 @@
         </p:blipFill>
         <p:spPr>
           <a:xfrm>
-            <a:off x="749808" y="4962049"/>
-            <a:ext cx="310896" cy="310896"/>
+            <a:off x="6562192" y="2792063"/>
+            <a:ext cx="256032" cy="256032"/>
           </a:xfrm>
           <a:prstGeom prst="rect">
             <a:avLst/>
@@ -4492,7 +4492,7 @@
                   <a:srgbClr val="FFFFFF"/>
                 </a:solidFill>
               </a:rPr>
-              <a:t>O que aprendemos na aula 03.01</a:t>
+              <a:t>O que aprendemos na aula 05.01</a:t>
             </a:r>
             <a:endParaRPr lang="en-US" sz="3200" dirty="0"/>
           </a:p>
@@ -4928,7 +4928,7 @@
                   <a:srgbClr val="FFFFFF"/>
                 </a:solidFill>
               </a:rPr>
-              <a:t>No curso, um serviço RAP de viagens alimenta um </a:t>
+              <a:t>No projeto, o serviço RAP de pedidos alimenta um </a:t>
             </a:r>
             <a:r>
               <a:rPr lang="en-US" sz="1400" b="1" dirty="0">
@@ -5010,7 +5010,7 @@
                   <a:srgbClr val="89D1FF"/>
                 </a:solidFill>
               </a:rPr>
-              <a:t>Próxima aula · 03.02  </a:t>
+              <a:t>Próxima aula · 05.02  </a:t>
             </a:r>
             <a:r>
               <a:rPr lang="en-US" sz="1500" dirty="0">
@@ -5064,7 +5064,7 @@
         </p:blipFill>
         <p:spPr>
           <a:xfrm>
-            <a:off x="6355080" y="2926080"/>
+            <a:off x="6355080" y="1965960"/>
             <a:ext cx="256032" cy="256032"/>
           </a:xfrm>
           <a:prstGeom prst="rect">
@@ -5088,7 +5088,7 @@
         </p:blipFill>
         <p:spPr>
           <a:xfrm>
-            <a:off x="822960" y="3886200"/>
+            <a:off x="822960" y="2926080"/>
             <a:ext cx="256032" cy="256032"/>
           </a:xfrm>
           <a:prstGeom prst="rect">
@@ -5112,7 +5112,7 @@
         </p:blipFill>
         <p:spPr>
           <a:xfrm>
-            <a:off x="822960" y="2926080"/>
+            <a:off x="6355080" y="2926080"/>
             <a:ext cx="256032" cy="256032"/>
           </a:xfrm>
           <a:prstGeom prst="rect">
@@ -5136,7 +5136,7 @@
         </p:blipFill>
         <p:spPr>
           <a:xfrm>
-            <a:off x="6355080" y="1965960"/>
+            <a:off x="822960" y="3886200"/>
             <a:ext cx="256032" cy="256032"/>
           </a:xfrm>
           <a:prstGeom prst="rect">
@@ -5287,7 +5287,7 @@
                   <a:srgbClr val="1D2D3E"/>
                 </a:solidFill>
               </a:rPr>
-              <a:t>Módulo 03 em 11 aulas: Fiori Elements com OData V4</a:t>
+              <a:t>Módulo 05 em 11 aulas: Fiori Elements com OData V4</a:t>
             </a:r>
             <a:endParaRPr lang="en-US" sz="2800" dirty="0"/>
           </a:p>
@@ -7157,7 +7157,7 @@
                   <a:srgbClr val="1D2D3E"/>
                 </a:solidFill>
               </a:rPr>
-              <a:t>entendemos o que o Fiori elements faz por nós, por que usar OData V4 e como um app de viagens nasce de um serviço RAP.</a:t>
+              <a:t>entendemos o que o Fiori elements faz por nós, por que usar OData V4 e como o app Pedidos de Compras nasce de um serviço RAP.</a:t>
             </a:r>
             <a:endParaRPr lang="en-US" sz="1400" dirty="0"/>
           </a:p>
@@ -7179,7 +7179,7 @@
         </p:blipFill>
         <p:spPr>
           <a:xfrm>
-            <a:off x="1696669" y="1847088"/>
+            <a:off x="3576218" y="1847088"/>
             <a:ext cx="347472" cy="347472"/>
           </a:xfrm>
           <a:prstGeom prst="rect">
@@ -7203,7 +7203,7 @@
         </p:blipFill>
         <p:spPr>
           <a:xfrm>
-            <a:off x="3576218" y="1847088"/>
+            <a:off x="1696669" y="1847088"/>
             <a:ext cx="347472" cy="347472"/>
           </a:xfrm>
           <a:prstGeom prst="rect">
@@ -7251,7 +7251,7 @@
         </p:blipFill>
         <p:spPr>
           <a:xfrm>
-            <a:off x="9214866" y="1847088"/>
+            <a:off x="7335317" y="1847088"/>
             <a:ext cx="347472" cy="347472"/>
           </a:xfrm>
           <a:prstGeom prst="rect">
@@ -7275,7 +7275,7 @@
         </p:blipFill>
         <p:spPr>
           <a:xfrm>
-            <a:off x="7335317" y="1847088"/>
+            <a:off x="9214866" y="1847088"/>
             <a:ext cx="347472" cy="347472"/>
           </a:xfrm>
           <a:prstGeom prst="rect">
@@ -7299,7 +7299,7 @@
         </p:blipFill>
         <p:spPr>
           <a:xfrm>
-            <a:off x="11094415" y="1847088"/>
+            <a:off x="1696669" y="3858768"/>
             <a:ext cx="347472" cy="347472"/>
           </a:xfrm>
           <a:prstGeom prst="rect">
@@ -7323,7 +7323,7 @@
         </p:blipFill>
         <p:spPr>
           <a:xfrm>
-            <a:off x="1696669" y="3858768"/>
+            <a:off x="11094415" y="1847088"/>
             <a:ext cx="347472" cy="347472"/>
           </a:xfrm>
           <a:prstGeom prst="rect">
@@ -7395,7 +7395,7 @@
         </p:blipFill>
         <p:spPr>
           <a:xfrm>
-            <a:off x="7335317" y="3858768"/>
+            <a:off x="9214866" y="3858768"/>
             <a:ext cx="347472" cy="347472"/>
           </a:xfrm>
           <a:prstGeom prst="rect">
@@ -7419,8 +7419,8 @@
         </p:blipFill>
         <p:spPr>
           <a:xfrm>
-            <a:off x="9214866" y="3858768"/>
-            <a:ext cx="347472" cy="347472"/>
+            <a:off x="749808" y="5751576"/>
+            <a:ext cx="310896" cy="310896"/>
           </a:xfrm>
           <a:prstGeom prst="rect">
             <a:avLst/>
@@ -7443,8 +7443,8 @@
         </p:blipFill>
         <p:spPr>
           <a:xfrm>
-            <a:off x="749808" y="5751576"/>
-            <a:ext cx="310896" cy="310896"/>
+            <a:off x="7335317" y="3858768"/>
+            <a:ext cx="347472" cy="347472"/>
           </a:xfrm>
           <a:prstGeom prst="rect">
             <a:avLst/>
@@ -8400,7 +8400,7 @@
         </p:blipFill>
         <p:spPr>
           <a:xfrm>
-            <a:off x="1598257" y="2084832"/>
+            <a:off x="10227678" y="2084832"/>
             <a:ext cx="365760" cy="365760"/>
           </a:xfrm>
           <a:prstGeom prst="rect">
@@ -8424,7 +8424,7 @@
         </p:blipFill>
         <p:spPr>
           <a:xfrm>
-            <a:off x="4474731" y="2084832"/>
+            <a:off x="1598257" y="2084832"/>
             <a:ext cx="365760" cy="365760"/>
           </a:xfrm>
           <a:prstGeom prst="rect">
@@ -8472,7 +8472,7 @@
         </p:blipFill>
         <p:spPr>
           <a:xfrm>
-            <a:off x="10227678" y="2084832"/>
+            <a:off x="4474731" y="2084832"/>
             <a:ext cx="365760" cy="365760"/>
           </a:xfrm>
           <a:prstGeom prst="rect">
@@ -8674,7 +8674,7 @@
                   <a:srgbClr val="89D1FF"/>
                 </a:solidFill>
               </a:rPr>
-              <a:t>AULA 03.01 · SEÇÃO 1</a:t>
+              <a:t>AULA 05.01 · SEÇÃO 1</a:t>
             </a:r>
             <a:endParaRPr lang="en-US" sz="1300" dirty="0"/>
           </a:p>
@@ -9705,7 +9705,7 @@
         </p:blipFill>
         <p:spPr>
           <a:xfrm>
-            <a:off x="3681146" y="2694432"/>
+            <a:off x="850392" y="2694432"/>
             <a:ext cx="256032" cy="256032"/>
           </a:xfrm>
           <a:prstGeom prst="rect">
@@ -9729,7 +9729,7 @@
         </p:blipFill>
         <p:spPr>
           <a:xfrm>
-            <a:off x="850392" y="2694432"/>
+            <a:off x="6511900" y="2694432"/>
             <a:ext cx="256032" cy="256032"/>
           </a:xfrm>
           <a:prstGeom prst="rect">
@@ -9753,7 +9753,7 @@
         </p:blipFill>
         <p:spPr>
           <a:xfrm>
-            <a:off x="6511900" y="2694432"/>
+            <a:off x="3681146" y="2694432"/>
             <a:ext cx="256032" cy="256032"/>
           </a:xfrm>
           <a:prstGeom prst="rect">
@@ -9931,7 +9931,7 @@
                   <a:srgbClr val="89D1FF"/>
                 </a:solidFill>
               </a:rPr>
-              <a:t>AULA 03.01 · SEÇÃO 2</a:t>
+              <a:t>AULA 05.01 · SEÇÃO 2</a:t>
             </a:r>
             <a:endParaRPr lang="en-US" sz="1300" dirty="0"/>
           </a:p>
@@ -11422,7 +11422,7 @@
                   <a:srgbClr val="9DA5B4"/>
                 </a:solidFill>
               </a:rPr>
-              <a:t>Travel service · navegador</a:t>
+              <a:t>Serviço ZUI_PC_PEDIDOS_COMPRAS · navegador</a:t>
             </a:r>
             <a:endParaRPr lang="en-US" sz="850" dirty="0"/>
           </a:p>
@@ -11728,6 +11728,26 @@
             </a:r>
             <a:endParaRPr lang="en-US" sz="950" dirty="0"/>
           </a:p>
+          <a:p>
+            <a:pPr algn="r" indent="0" marL="0">
+              <a:lnSpc>
+                <a:spcPct val="105000"/>
+              </a:lnSpc>
+              <a:buNone/>
+            </a:pPr>
+            <a:r>
+              <a:rPr lang="en-US" sz="950" dirty="0">
+                <a:solidFill>
+                  <a:srgbClr val="6E7681"/>
+                </a:solidFill>
+                <a:latin typeface="Courier New" pitchFamily="34" charset="0"/>
+                <a:ea typeface="Courier New" pitchFamily="34" charset="-122"/>
+                <a:cs typeface="Courier New" pitchFamily="34" charset="-120"/>
+              </a:rPr>
+              <a:t>15</a:t>
+            </a:r>
+            <a:endParaRPr lang="en-US" sz="950" dirty="0"/>
+          </a:p>
         </p:txBody>
       </p:sp>
       <p:sp>
@@ -11786,7 +11806,7 @@
                 <a:ea typeface="Courier New" pitchFamily="34" charset="-122"/>
                 <a:cs typeface="Courier New" pitchFamily="34" charset="-120"/>
               </a:rPr>
-              <a:t>/sap/opu/odata4/sap/zui_fe_travel_o4/srvd/sap/zfe_travel/0001/</a:t>
+              <a:t>/sap/opu/odata4/sap/zui_pc_pedidos_compras_o4/srvd/sap/</a:t>
             </a:r>
             <a:endParaRPr lang="en-US" sz="950" dirty="0"/>
           </a:p>
@@ -11800,13 +11820,24 @@
             <a:r>
               <a:rPr lang="en-US" sz="950" dirty="0">
                 <a:solidFill>
-                  <a:srgbClr val="000000"/>
+                  <a:srgbClr val="CCCCCC"/>
                 </a:solidFill>
                 <a:latin typeface="Courier New" pitchFamily="34" charset="0"/>
                 <a:ea typeface="Courier New" pitchFamily="34" charset="-122"/>
                 <a:cs typeface="Courier New" pitchFamily="34" charset="-120"/>
               </a:rPr>
-              <a:t> </a:t>
+              <a:t>  </a:t>
+            </a:r>
+            <a:r>
+              <a:rPr lang="en-US" sz="950" dirty="0">
+                <a:solidFill>
+                  <a:srgbClr val="CCCCCC"/>
+                </a:solidFill>
+                <a:latin typeface="Courier New" pitchFamily="34" charset="0"/>
+                <a:ea typeface="Courier New" pitchFamily="34" charset="-122"/>
+                <a:cs typeface="Courier New" pitchFamily="34" charset="-120"/>
+              </a:rPr>
+              <a:t>zui_pc_pedidos_compras/0001/</a:t>
             </a:r>
             <a:endParaRPr lang="en-US" sz="950" dirty="0"/>
           </a:p>
@@ -11818,15 +11849,15 @@
               <a:buNone/>
             </a:pPr>
             <a:r>
-              <a:rPr lang="en-US" sz="950" i="1" dirty="0">
-                <a:solidFill>
-                  <a:srgbClr val="6A9955"/>
+              <a:rPr lang="en-US" sz="950" dirty="0">
+                <a:solidFill>
+                  <a:srgbClr val="000000"/>
                 </a:solidFill>
                 <a:latin typeface="Courier New" pitchFamily="34" charset="0"/>
                 <a:ea typeface="Courier New" pitchFamily="34" charset="-122"/>
                 <a:cs typeface="Courier New" pitchFamily="34" charset="-120"/>
               </a:rPr>
-              <a:t>" 2. Resource path: entity set</a:t>
+              <a:t> </a:t>
             </a:r>
             <a:endParaRPr lang="en-US" sz="950" dirty="0"/>
           </a:p>
@@ -11838,15 +11869,15 @@
               <a:buNone/>
             </a:pPr>
             <a:r>
-              <a:rPr lang="en-US" sz="950" dirty="0">
-                <a:solidFill>
-                  <a:srgbClr val="CCCCCC"/>
+              <a:rPr lang="en-US" sz="950" i="1" dirty="0">
+                <a:solidFill>
+                  <a:srgbClr val="6A9955"/>
                 </a:solidFill>
                 <a:latin typeface="Courier New" pitchFamily="34" charset="0"/>
                 <a:ea typeface="Courier New" pitchFamily="34" charset="-122"/>
                 <a:cs typeface="Courier New" pitchFamily="34" charset="-120"/>
               </a:rPr>
-              <a:t>Travel</a:t>
+              <a:t>" 2. Resource path: entity set</a:t>
             </a:r>
             <a:endParaRPr lang="en-US" sz="950" dirty="0"/>
           </a:p>
@@ -11860,13 +11891,13 @@
             <a:r>
               <a:rPr lang="en-US" sz="950" dirty="0">
                 <a:solidFill>
-                  <a:srgbClr val="000000"/>
+                  <a:srgbClr val="CCCCCC"/>
                 </a:solidFill>
                 <a:latin typeface="Courier New" pitchFamily="34" charset="0"/>
                 <a:ea typeface="Courier New" pitchFamily="34" charset="-122"/>
                 <a:cs typeface="Courier New" pitchFamily="34" charset="-120"/>
               </a:rPr>
-              <a:t> </a:t>
+              <a:t>Pedido</a:t>
             </a:r>
             <a:endParaRPr lang="en-US" sz="950" dirty="0"/>
           </a:p>
@@ -11878,15 +11909,15 @@
               <a:buNone/>
             </a:pPr>
             <a:r>
-              <a:rPr lang="en-US" sz="950" i="1" dirty="0">
-                <a:solidFill>
-                  <a:srgbClr val="6A9955"/>
+              <a:rPr lang="en-US" sz="950" dirty="0">
+                <a:solidFill>
+                  <a:srgbClr val="000000"/>
                 </a:solidFill>
                 <a:latin typeface="Courier New" pitchFamily="34" charset="0"/>
                 <a:ea typeface="Courier New" pitchFamily="34" charset="-122"/>
                 <a:cs typeface="Courier New" pitchFamily="34" charset="-120"/>
               </a:rPr>
-              <a:t>" 3. Query options</a:t>
+              <a:t> </a:t>
             </a:r>
             <a:endParaRPr lang="en-US" sz="950" dirty="0"/>
           </a:p>
@@ -11898,103 +11929,15 @@
               <a:buNone/>
             </a:pPr>
             <a:r>
-              <a:rPr lang="en-US" sz="950" dirty="0">
-                <a:solidFill>
-                  <a:srgbClr val="CCCCCC"/>
+              <a:rPr lang="en-US" sz="950" i="1" dirty="0">
+                <a:solidFill>
+                  <a:srgbClr val="6A9955"/>
                 </a:solidFill>
                 <a:latin typeface="Courier New" pitchFamily="34" charset="0"/>
                 <a:ea typeface="Courier New" pitchFamily="34" charset="-122"/>
                 <a:cs typeface="Courier New" pitchFamily="34" charset="-120"/>
               </a:rPr>
-              <a:t>?</a:t>
-            </a:r>
-            <a:r>
-              <a:rPr lang="en-US" sz="950" dirty="0">
-                <a:solidFill>
-                  <a:srgbClr val="CCCCCC"/>
-                </a:solidFill>
-                <a:latin typeface="Courier New" pitchFamily="34" charset="0"/>
-                <a:ea typeface="Courier New" pitchFamily="34" charset="-122"/>
-                <a:cs typeface="Courier New" pitchFamily="34" charset="-120"/>
-              </a:rPr>
-              <a:t>$</a:t>
-            </a:r>
-            <a:r>
-              <a:rPr lang="en-US" sz="950" dirty="0">
-                <a:solidFill>
-                  <a:srgbClr val="CCCCCC"/>
-                </a:solidFill>
-                <a:latin typeface="Courier New" pitchFamily="34" charset="0"/>
-                <a:ea typeface="Courier New" pitchFamily="34" charset="-122"/>
-                <a:cs typeface="Courier New" pitchFamily="34" charset="-120"/>
-              </a:rPr>
-              <a:t>select</a:t>
-            </a:r>
-            <a:r>
-              <a:rPr lang="en-US" sz="950" dirty="0">
-                <a:solidFill>
-                  <a:srgbClr val="CCCCCC"/>
-                </a:solidFill>
-                <a:latin typeface="Courier New" pitchFamily="34" charset="0"/>
-                <a:ea typeface="Courier New" pitchFamily="34" charset="-122"/>
-                <a:cs typeface="Courier New" pitchFamily="34" charset="-120"/>
-              </a:rPr>
-              <a:t>=</a:t>
-            </a:r>
-            <a:r>
-              <a:rPr lang="en-US" sz="950" dirty="0">
-                <a:solidFill>
-                  <a:srgbClr val="CCCCCC"/>
-                </a:solidFill>
-                <a:latin typeface="Courier New" pitchFamily="34" charset="0"/>
-                <a:ea typeface="Courier New" pitchFamily="34" charset="-122"/>
-                <a:cs typeface="Courier New" pitchFamily="34" charset="-120"/>
-              </a:rPr>
-              <a:t>TravelID</a:t>
-            </a:r>
-            <a:r>
-              <a:rPr lang="en-US" sz="950" dirty="0">
-                <a:solidFill>
-                  <a:srgbClr val="CCCCCC"/>
-                </a:solidFill>
-                <a:latin typeface="Courier New" pitchFamily="34" charset="0"/>
-                <a:ea typeface="Courier New" pitchFamily="34" charset="-122"/>
-                <a:cs typeface="Courier New" pitchFamily="34" charset="-120"/>
-              </a:rPr>
-              <a:t>,</a:t>
-            </a:r>
-            <a:r>
-              <a:rPr lang="en-US" sz="950" dirty="0">
-                <a:solidFill>
-                  <a:srgbClr val="CCCCCC"/>
-                </a:solidFill>
-                <a:latin typeface="Courier New" pitchFamily="34" charset="0"/>
-                <a:ea typeface="Courier New" pitchFamily="34" charset="-122"/>
-                <a:cs typeface="Courier New" pitchFamily="34" charset="-120"/>
-              </a:rPr>
-              <a:t>CustomerID</a:t>
-            </a:r>
-            <a:r>
-              <a:rPr lang="en-US" sz="950" dirty="0">
-                <a:solidFill>
-                  <a:srgbClr val="CCCCCC"/>
-                </a:solidFill>
-                <a:latin typeface="Courier New" pitchFamily="34" charset="0"/>
-                <a:ea typeface="Courier New" pitchFamily="34" charset="-122"/>
-                <a:cs typeface="Courier New" pitchFamily="34" charset="-120"/>
-              </a:rPr>
-              <a:t>,</a:t>
-            </a:r>
-            <a:r>
-              <a:rPr lang="en-US" sz="950" dirty="0">
-                <a:solidFill>
-                  <a:srgbClr val="CCCCCC"/>
-                </a:solidFill>
-                <a:latin typeface="Courier New" pitchFamily="34" charset="0"/>
-                <a:ea typeface="Courier New" pitchFamily="34" charset="-122"/>
-                <a:cs typeface="Courier New" pitchFamily="34" charset="-120"/>
-              </a:rPr>
-              <a:t>TotalPrice</a:t>
+              <a:t>" 3. Query options</a:t>
             </a:r>
             <a:endParaRPr lang="en-US" sz="950" dirty="0"/>
           </a:p>
@@ -12014,7 +11957,7 @@
                 <a:ea typeface="Courier New" pitchFamily="34" charset="-122"/>
                 <a:cs typeface="Courier New" pitchFamily="34" charset="-120"/>
               </a:rPr>
-              <a:t>&amp;</a:t>
+              <a:t>?</a:t>
             </a:r>
             <a:r>
               <a:rPr lang="en-US" sz="950" dirty="0">
@@ -12036,7 +11979,7 @@
                 <a:ea typeface="Courier New" pitchFamily="34" charset="-122"/>
                 <a:cs typeface="Courier New" pitchFamily="34" charset="-120"/>
               </a:rPr>
-              <a:t>filter</a:t>
+              <a:t>select</a:t>
             </a:r>
             <a:r>
               <a:rPr lang="en-US" sz="950" dirty="0">
@@ -12058,7 +12001,7 @@
                 <a:ea typeface="Courier New" pitchFamily="34" charset="-122"/>
                 <a:cs typeface="Courier New" pitchFamily="34" charset="-120"/>
               </a:rPr>
-              <a:t>OverallStatus</a:t>
+              <a:t>NumeroPedido</a:t>
             </a:r>
             <a:r>
               <a:rPr lang="en-US" sz="950" dirty="0">
@@ -12069,7 +12012,7 @@
                 <a:ea typeface="Courier New" pitchFamily="34" charset="-122"/>
                 <a:cs typeface="Courier New" pitchFamily="34" charset="-120"/>
               </a:rPr>
-              <a:t> </a:t>
+              <a:t>,</a:t>
             </a:r>
             <a:r>
               <a:rPr lang="en-US" sz="950" dirty="0">
@@ -12080,7 +12023,7 @@
                 <a:ea typeface="Courier New" pitchFamily="34" charset="-122"/>
                 <a:cs typeface="Courier New" pitchFamily="34" charset="-120"/>
               </a:rPr>
-              <a:t>eq</a:t>
+              <a:t>NomeCliente</a:t>
             </a:r>
             <a:r>
               <a:rPr lang="en-US" sz="950" dirty="0">
@@ -12091,18 +12034,18 @@
                 <a:ea typeface="Courier New" pitchFamily="34" charset="-122"/>
                 <a:cs typeface="Courier New" pitchFamily="34" charset="-120"/>
               </a:rPr>
-              <a:t> </a:t>
+              <a:t>,</a:t>
             </a:r>
             <a:r>
               <a:rPr lang="en-US" sz="950" dirty="0">
                 <a:solidFill>
-                  <a:srgbClr val="CE9178"/>
+                  <a:srgbClr val="CCCCCC"/>
                 </a:solidFill>
                 <a:latin typeface="Courier New" pitchFamily="34" charset="0"/>
                 <a:ea typeface="Courier New" pitchFamily="34" charset="-122"/>
                 <a:cs typeface="Courier New" pitchFamily="34" charset="-120"/>
               </a:rPr>
-              <a:t>'A'</a:t>
+              <a:t>ValorTotal</a:t>
             </a:r>
             <a:endParaRPr lang="en-US" sz="950" dirty="0"/>
           </a:p>
@@ -12144,7 +12087,7 @@
                 <a:ea typeface="Courier New" pitchFamily="34" charset="-122"/>
                 <a:cs typeface="Courier New" pitchFamily="34" charset="-120"/>
               </a:rPr>
-              <a:t>orderby</a:t>
+              <a:t>filter</a:t>
             </a:r>
             <a:r>
               <a:rPr lang="en-US" sz="950" dirty="0">
@@ -12166,7 +12109,7 @@
                 <a:ea typeface="Courier New" pitchFamily="34" charset="-122"/>
                 <a:cs typeface="Courier New" pitchFamily="34" charset="-120"/>
               </a:rPr>
-              <a:t>BeginDate</a:t>
+              <a:t>StatusPedido</a:t>
             </a:r>
             <a:r>
               <a:rPr lang="en-US" sz="950" dirty="0">
@@ -12188,7 +12131,29 @@
                 <a:ea typeface="Courier New" pitchFamily="34" charset="-122"/>
                 <a:cs typeface="Courier New" pitchFamily="34" charset="-120"/>
               </a:rPr>
-              <a:t>desc</a:t>
+              <a:t>eq</a:t>
+            </a:r>
+            <a:r>
+              <a:rPr lang="en-US" sz="950" dirty="0">
+                <a:solidFill>
+                  <a:srgbClr val="CCCCCC"/>
+                </a:solidFill>
+                <a:latin typeface="Courier New" pitchFamily="34" charset="0"/>
+                <a:ea typeface="Courier New" pitchFamily="34" charset="-122"/>
+                <a:cs typeface="Courier New" pitchFamily="34" charset="-120"/>
+              </a:rPr>
+              <a:t> </a:t>
+            </a:r>
+            <a:r>
+              <a:rPr lang="en-US" sz="950" dirty="0">
+                <a:solidFill>
+                  <a:srgbClr val="CE9178"/>
+                </a:solidFill>
+                <a:latin typeface="Courier New" pitchFamily="34" charset="0"/>
+                <a:ea typeface="Courier New" pitchFamily="34" charset="-122"/>
+                <a:cs typeface="Courier New" pitchFamily="34" charset="-120"/>
+              </a:rPr>
+              <a:t>'ABERTO'</a:t>
             </a:r>
             <a:endParaRPr lang="en-US" sz="950" dirty="0"/>
           </a:p>
@@ -12230,7 +12195,7 @@
                 <a:ea typeface="Courier New" pitchFamily="34" charset="-122"/>
                 <a:cs typeface="Courier New" pitchFamily="34" charset="-120"/>
               </a:rPr>
-              <a:t>top</a:t>
+              <a:t>orderby</a:t>
             </a:r>
             <a:r>
               <a:rPr lang="en-US" sz="950" dirty="0">
@@ -12246,13 +12211,35 @@
             <a:r>
               <a:rPr lang="en-US" sz="950" dirty="0">
                 <a:solidFill>
-                  <a:srgbClr val="B5CEA8"/>
+                  <a:srgbClr val="CCCCCC"/>
                 </a:solidFill>
                 <a:latin typeface="Courier New" pitchFamily="34" charset="0"/>
                 <a:ea typeface="Courier New" pitchFamily="34" charset="-122"/>
                 <a:cs typeface="Courier New" pitchFamily="34" charset="-120"/>
               </a:rPr>
-              <a:t>20</a:t>
+              <a:t>CreatedAt</a:t>
+            </a:r>
+            <a:r>
+              <a:rPr lang="en-US" sz="950" dirty="0">
+                <a:solidFill>
+                  <a:srgbClr val="CCCCCC"/>
+                </a:solidFill>
+                <a:latin typeface="Courier New" pitchFamily="34" charset="0"/>
+                <a:ea typeface="Courier New" pitchFamily="34" charset="-122"/>
+                <a:cs typeface="Courier New" pitchFamily="34" charset="-120"/>
+              </a:rPr>
+              <a:t> </a:t>
+            </a:r>
+            <a:r>
+              <a:rPr lang="en-US" sz="950" dirty="0">
+                <a:solidFill>
+                  <a:srgbClr val="CCCCCC"/>
+                </a:solidFill>
+                <a:latin typeface="Courier New" pitchFamily="34" charset="0"/>
+                <a:ea typeface="Courier New" pitchFamily="34" charset="-122"/>
+                <a:cs typeface="Courier New" pitchFamily="34" charset="-120"/>
+              </a:rPr>
+              <a:t>desc</a:t>
             </a:r>
             <a:endParaRPr lang="en-US" sz="950" dirty="0"/>
           </a:p>
@@ -12266,13 +12253,57 @@
             <a:r>
               <a:rPr lang="en-US" sz="950" dirty="0">
                 <a:solidFill>
-                  <a:srgbClr val="000000"/>
+                  <a:srgbClr val="CCCCCC"/>
                 </a:solidFill>
                 <a:latin typeface="Courier New" pitchFamily="34" charset="0"/>
                 <a:ea typeface="Courier New" pitchFamily="34" charset="-122"/>
                 <a:cs typeface="Courier New" pitchFamily="34" charset="-120"/>
               </a:rPr>
-              <a:t> </a:t>
+              <a:t>&amp;</a:t>
+            </a:r>
+            <a:r>
+              <a:rPr lang="en-US" sz="950" dirty="0">
+                <a:solidFill>
+                  <a:srgbClr val="CCCCCC"/>
+                </a:solidFill>
+                <a:latin typeface="Courier New" pitchFamily="34" charset="0"/>
+                <a:ea typeface="Courier New" pitchFamily="34" charset="-122"/>
+                <a:cs typeface="Courier New" pitchFamily="34" charset="-120"/>
+              </a:rPr>
+              <a:t>$</a:t>
+            </a:r>
+            <a:r>
+              <a:rPr lang="en-US" sz="950" dirty="0">
+                <a:solidFill>
+                  <a:srgbClr val="CCCCCC"/>
+                </a:solidFill>
+                <a:latin typeface="Courier New" pitchFamily="34" charset="0"/>
+                <a:ea typeface="Courier New" pitchFamily="34" charset="-122"/>
+                <a:cs typeface="Courier New" pitchFamily="34" charset="-120"/>
+              </a:rPr>
+              <a:t>top</a:t>
+            </a:r>
+            <a:r>
+              <a:rPr lang="en-US" sz="950" dirty="0">
+                <a:solidFill>
+                  <a:srgbClr val="CCCCCC"/>
+                </a:solidFill>
+                <a:latin typeface="Courier New" pitchFamily="34" charset="0"/>
+                <a:ea typeface="Courier New" pitchFamily="34" charset="-122"/>
+                <a:cs typeface="Courier New" pitchFamily="34" charset="-120"/>
+              </a:rPr>
+              <a:t>=</a:t>
+            </a:r>
+            <a:r>
+              <a:rPr lang="en-US" sz="950" dirty="0">
+                <a:solidFill>
+                  <a:srgbClr val="B5CEA8"/>
+                </a:solidFill>
+                <a:latin typeface="Courier New" pitchFamily="34" charset="0"/>
+                <a:ea typeface="Courier New" pitchFamily="34" charset="-122"/>
+                <a:cs typeface="Courier New" pitchFamily="34" charset="-120"/>
+              </a:rPr>
+              <a:t>20</a:t>
             </a:r>
             <a:endParaRPr lang="en-US" sz="950" dirty="0"/>
           </a:p>
@@ -12284,15 +12315,15 @@
               <a:buNone/>
             </a:pPr>
             <a:r>
-              <a:rPr lang="en-US" sz="950" i="1" dirty="0">
-                <a:solidFill>
-                  <a:srgbClr val="6A9955"/>
+              <a:rPr lang="en-US" sz="950" dirty="0">
+                <a:solidFill>
+                  <a:srgbClr val="000000"/>
                 </a:solidFill>
                 <a:latin typeface="Courier New" pitchFamily="34" charset="0"/>
                 <a:ea typeface="Courier New" pitchFamily="34" charset="-122"/>
                 <a:cs typeface="Courier New" pitchFamily="34" charset="-120"/>
               </a:rPr>
-              <a:t>" Estrutura do serviço</a:t>
+              <a:t> </a:t>
             </a:r>
             <a:endParaRPr lang="en-US" sz="950" dirty="0"/>
           </a:p>
@@ -12304,15 +12335,46 @@
               <a:buNone/>
             </a:pPr>
             <a:r>
-              <a:rPr lang="en-US" sz="950" dirty="0">
-                <a:solidFill>
-                  <a:srgbClr val="CCCCCC"/>
+              <a:rPr lang="en-US" sz="950" i="1" dirty="0">
+                <a:solidFill>
+                  <a:srgbClr val="6A9955"/>
                 </a:solidFill>
                 <a:latin typeface="Courier New" pitchFamily="34" charset="0"/>
                 <a:ea typeface="Courier New" pitchFamily="34" charset="-122"/>
                 <a:cs typeface="Courier New" pitchFamily="34" charset="-120"/>
               </a:rPr>
-              <a:t>/sap/opu/odata4/sap/zui_fe_travel_o4/srvd/sap/zfe_travel/0001/</a:t>
+              <a:t>" Estrutura do serviço</a:t>
+            </a:r>
+            <a:endParaRPr lang="en-US" sz="950" dirty="0"/>
+          </a:p>
+          <a:p>
+            <a:pPr indent="0" marL="0">
+              <a:lnSpc>
+                <a:spcPct val="105000"/>
+              </a:lnSpc>
+              <a:buNone/>
+            </a:pPr>
+            <a:r>
+              <a:rPr lang="en-US" sz="950" dirty="0">
+                <a:solidFill>
+                  <a:srgbClr val="CCCCCC"/>
+                </a:solidFill>
+                <a:latin typeface="Courier New" pitchFamily="34" charset="0"/>
+                <a:ea typeface="Courier New" pitchFamily="34" charset="-122"/>
+                <a:cs typeface="Courier New" pitchFamily="34" charset="-120"/>
+              </a:rPr>
+              <a:t>…</a:t>
+            </a:r>
+            <a:r>
+              <a:rPr lang="en-US" sz="950" dirty="0">
+                <a:solidFill>
+                  <a:srgbClr val="CCCCCC"/>
+                </a:solidFill>
+                <a:latin typeface="Courier New" pitchFamily="34" charset="0"/>
+                <a:ea typeface="Courier New" pitchFamily="34" charset="-122"/>
+                <a:cs typeface="Courier New" pitchFamily="34" charset="-120"/>
+              </a:rPr>
+              <a:t>/zui_pc_pedidos_compras/0001/</a:t>
             </a:r>
             <a:r>
               <a:rPr lang="en-US" sz="950" dirty="0">
@@ -13022,7 +13084,7 @@
                   <a:srgbClr val="89D1FF"/>
                 </a:solidFill>
               </a:rPr>
-              <a:t>AULA 03.01 · SEÇÃO 3</a:t>
+              <a:t>AULA 05.01 · SEÇÃO 3</a:t>
             </a:r>
             <a:endParaRPr lang="en-US" sz="1300" dirty="0"/>
           </a:p>
@@ -13094,7 +13156,7 @@
                   <a:srgbClr val="D1EFFF"/>
                 </a:solidFill>
               </a:rPr>
-              <a:t>No curso, um </a:t>
+              <a:t>No projeto, o </a:t>
             </a:r>
             <a:r>
               <a:rPr lang="en-US" sz="1600" b="1" dirty="0">
@@ -13110,7 +13172,7 @@
                   <a:srgbClr val="D1EFFF"/>
                 </a:solidFill>
               </a:rPr>
-              <a:t> de viagens no BTP ABAP environment alimenta um app </a:t>
+              <a:t> de pedidos no BTP ABAP environment alimenta o app </a:t>
             </a:r>
             <a:r>
               <a:rPr lang="en-US" sz="1600" b="1" dirty="0">
@@ -13126,7 +13188,7 @@
                   <a:srgbClr val="D1EFFF"/>
                 </a:solidFill>
               </a:rPr>
-              <a:t>.</a:t>
+              <a:t> Pedidos de Compras.</a:t>
             </a:r>
             <a:endParaRPr lang="en-US" sz="1400" dirty="0"/>
           </a:p>
